--- a/Lecture Slides/07 - Preprocessor Directives and Macro Concepts.pptx
+++ b/Lecture Slides/07 - Preprocessor Directives and Macro Concepts.pptx
@@ -134,7 +134,7 @@
           <a:p>
             <a:fld id="{190F6AAB-3EE7-40BB-8A65-A17127364E6C}" type="datetimeFigureOut">
               <a:rPr lang="en-US" smtClean="0"/>
-              <a:t>2/7/2026</a:t>
+              <a:t>2/9/2026</a:t>
             </a:fld>
             <a:endParaRPr lang="en-US"/>
           </a:p>
@@ -597,10 +597,27 @@
           <a:p>
             <a:r>
               <a:rPr lang="en-US" b="1" dirty="0"/>
-              <a:t>File Inclusion - </a:t>
-            </a:r>
-            <a:r>
-              <a:rPr lang="en-US" sz="1200" b="1" kern="1200" dirty="0">
+              <a:t>Macro Expansion Pitfalls</a:t>
+            </a:r>
+          </a:p>
+          <a:p>
+            <a:r>
+              <a:rPr lang="en-US" dirty="0"/>
+              <a:t>Lack of parentheses in macro definitions can lead to logical errors due to operator precedence.</a:t>
+            </a:r>
+          </a:p>
+          <a:p>
+            <a:endParaRPr lang="en-US" dirty="0"/>
+          </a:p>
+          <a:p>
+            <a:r>
+              <a:rPr lang="en-US" u="sng" dirty="0"/>
+              <a:t>Example: </a:t>
+            </a:r>
+          </a:p>
+          <a:p>
+            <a:r>
+              <a:rPr lang="en-US" sz="1200" kern="1200" dirty="0">
                 <a:solidFill>
                   <a:schemeClr val="tx1"/>
                 </a:solidFill>
@@ -608,26 +625,12 @@
                 <a:ea typeface="+mn-ea"/>
                 <a:cs typeface="+mn-cs"/>
               </a:rPr>
-              <a:t>#include</a:t>
-            </a:r>
-            <a:endParaRPr lang="en-US" b="1" dirty="0"/>
-          </a:p>
-          <a:p>
+              <a:t>SQUARE(3+4)</a:t>
+            </a:r>
             <a:r>
               <a:rPr lang="en-US" dirty="0"/>
-              <a:t>Tells the preprocessor to insert the contents of a specified file into the current file.</a:t>
-            </a:r>
-          </a:p>
-          <a:p>
-            <a:endParaRPr lang="en-US" dirty="0"/>
-          </a:p>
-          <a:p>
-            <a:r>
-              <a:rPr lang="en-US" dirty="0"/>
-              <a:t>Standard syntax: </a:t>
-            </a:r>
-          </a:p>
-          <a:p>
+              <a:t> without internal parentheses would expand to </a:t>
+            </a:r>
             <a:r>
               <a:rPr lang="en-US" sz="1200" kern="1200" dirty="0">
                 <a:solidFill>
@@ -637,12 +640,311 @@
                 <a:ea typeface="+mn-ea"/>
                 <a:cs typeface="+mn-cs"/>
               </a:rPr>
-              <a:t>#include &lt;filename&gt;</a:t>
+              <a:t>3+4 * 3+4</a:t>
             </a:r>
             <a:r>
               <a:rPr lang="en-US" dirty="0"/>
-              <a:t> for system headers.</a:t>
-            </a:r>
+              <a:t>, resulting in </a:t>
+            </a:r>
+            <a:r>
+              <a:rPr lang="en-US" sz="1200" kern="1200" dirty="0">
+                <a:solidFill>
+                  <a:schemeClr val="tx1"/>
+                </a:solidFill>
+                <a:latin typeface="+mn-lt"/>
+                <a:ea typeface="+mn-ea"/>
+                <a:cs typeface="+mn-cs"/>
+              </a:rPr>
+              <a:t>19</a:t>
+            </a:r>
+            <a:r>
+              <a:rPr lang="en-US" dirty="0"/>
+              <a:t> instead of </a:t>
+            </a:r>
+            <a:r>
+              <a:rPr lang="en-US" sz="1200" kern="1200" dirty="0">
+                <a:solidFill>
+                  <a:schemeClr val="tx1"/>
+                </a:solidFill>
+                <a:latin typeface="+mn-lt"/>
+                <a:ea typeface="+mn-ea"/>
+                <a:cs typeface="+mn-cs"/>
+              </a:rPr>
+              <a:t>49</a:t>
+            </a:r>
+            <a:r>
+              <a:rPr lang="en-US" dirty="0"/>
+              <a:t>.</a:t>
+            </a:r>
+          </a:p>
+          <a:p>
+            <a:endParaRPr lang="en-US" dirty="0"/>
+          </a:p>
+          <a:p>
+            <a:r>
+              <a:rPr lang="en-US" b="1" dirty="0"/>
+              <a:t>Macros vs. Functions</a:t>
+            </a:r>
+          </a:p>
+          <a:p>
+            <a:pPr marL="171450" indent="-171450">
+              <a:buFont typeface="Arial" panose="020B0604020202020204" pitchFamily="34" charset="0"/>
+              <a:buChar char="•"/>
+            </a:pPr>
+            <a:r>
+              <a:rPr lang="en-US" b="1" dirty="0"/>
+              <a:t>Macros</a:t>
+            </a:r>
+            <a:r>
+              <a:rPr lang="en-US" dirty="0"/>
+              <a:t>: </a:t>
+            </a:r>
+            <a:br>
+              <a:rPr lang="en-US" dirty="0"/>
+            </a:br>
+            <a:r>
+              <a:rPr lang="en-US" dirty="0"/>
+              <a:t>Pre-processed, no type checking, no call overhead, </a:t>
+            </a:r>
+            <a:br>
+              <a:rPr lang="en-US" dirty="0"/>
+            </a:br>
+            <a:r>
+              <a:rPr lang="en-US" dirty="0"/>
+              <a:t>code size increases as they are expanded in-place.</a:t>
+            </a:r>
+          </a:p>
+          <a:p>
+            <a:pPr marL="171450" indent="-171450">
+              <a:buFont typeface="Arial" panose="020B0604020202020204" pitchFamily="34" charset="0"/>
+              <a:buChar char="•"/>
+            </a:pPr>
+            <a:r>
+              <a:rPr lang="en-US" b="1" dirty="0"/>
+              <a:t>Functions</a:t>
+            </a:r>
+            <a:r>
+              <a:rPr lang="en-US" dirty="0"/>
+              <a:t>: </a:t>
+            </a:r>
+            <a:br>
+              <a:rPr lang="en-US" dirty="0"/>
+            </a:br>
+            <a:r>
+              <a:rPr lang="en-US" dirty="0"/>
+              <a:t>Compiled, strict type checking, involves call overhead, </a:t>
+            </a:r>
+            <a:br>
+              <a:rPr lang="en-US" dirty="0"/>
+            </a:br>
+            <a:r>
+              <a:rPr lang="en-US" dirty="0"/>
+              <a:t>code size remains smaller as the function is stored in one place.</a:t>
+            </a:r>
+          </a:p>
+          <a:p>
+            <a:endParaRPr lang="en-US" dirty="0"/>
+          </a:p>
+          <a:p>
+            <a:endParaRPr lang="en-US" dirty="0"/>
+          </a:p>
+          <a:p>
+            <a:r>
+              <a:rPr lang="en-US" i="1" u="sng" dirty="0"/>
+              <a:t>Optional:</a:t>
+            </a:r>
+          </a:p>
+          <a:p>
+            <a:endParaRPr lang="en-US" dirty="0"/>
+          </a:p>
+          <a:p>
+            <a:r>
+              <a:rPr lang="en-US" b="1" dirty="0"/>
+              <a:t>Miscellaneous Directives (</a:t>
+            </a:r>
+            <a:r>
+              <a:rPr lang="en-US" sz="1200" b="1" kern="1200" dirty="0">
+                <a:solidFill>
+                  <a:schemeClr val="tx1"/>
+                </a:solidFill>
+                <a:latin typeface="+mn-lt"/>
+                <a:ea typeface="+mn-ea"/>
+                <a:cs typeface="+mn-cs"/>
+              </a:rPr>
+              <a:t>#error</a:t>
+            </a:r>
+            <a:r>
+              <a:rPr lang="en-US" b="1" dirty="0"/>
+              <a:t>, </a:t>
+            </a:r>
+            <a:r>
+              <a:rPr lang="en-US" sz="1200" b="1" kern="1200" dirty="0">
+                <a:solidFill>
+                  <a:schemeClr val="tx1"/>
+                </a:solidFill>
+                <a:latin typeface="+mn-lt"/>
+                <a:ea typeface="+mn-ea"/>
+                <a:cs typeface="+mn-cs"/>
+              </a:rPr>
+              <a:t>#line</a:t>
+            </a:r>
+            <a:r>
+              <a:rPr lang="en-US" b="1" dirty="0"/>
+              <a:t>)</a:t>
+            </a:r>
+          </a:p>
+          <a:p>
+            <a:pPr marL="171450" indent="-171450">
+              <a:buFont typeface="Arial" panose="020B0604020202020204" pitchFamily="34" charset="0"/>
+              <a:buChar char="•"/>
+            </a:pPr>
+            <a:r>
+              <a:rPr lang="en-US" sz="1200" kern="1200" dirty="0">
+                <a:solidFill>
+                  <a:schemeClr val="tx1"/>
+                </a:solidFill>
+                <a:latin typeface="+mn-lt"/>
+                <a:ea typeface="+mn-ea"/>
+                <a:cs typeface="+mn-cs"/>
+              </a:rPr>
+              <a:t>#error</a:t>
+            </a:r>
+            <a:r>
+              <a:rPr lang="en-US" dirty="0"/>
+              <a:t>: Forces the compiler to stop and display a specific message.</a:t>
+            </a:r>
+          </a:p>
+          <a:p>
+            <a:pPr marL="171450" indent="-171450">
+              <a:buFont typeface="Arial" panose="020B0604020202020204" pitchFamily="34" charset="0"/>
+              <a:buChar char="•"/>
+            </a:pPr>
+            <a:r>
+              <a:rPr lang="en-US" sz="1200" kern="1200" dirty="0">
+                <a:solidFill>
+                  <a:schemeClr val="tx1"/>
+                </a:solidFill>
+                <a:latin typeface="+mn-lt"/>
+                <a:ea typeface="+mn-ea"/>
+                <a:cs typeface="+mn-cs"/>
+              </a:rPr>
+              <a:t>#line</a:t>
+            </a:r>
+            <a:r>
+              <a:rPr lang="en-US" dirty="0"/>
+              <a:t>: Used to change the line number and filename reported by the compiler during error messages.</a:t>
+            </a:r>
+          </a:p>
+          <a:p>
+            <a:endParaRPr lang="en-US" dirty="0"/>
+          </a:p>
+          <a:p>
+            <a:r>
+              <a:rPr lang="en-US" b="1" dirty="0"/>
+              <a:t>The </a:t>
+            </a:r>
+            <a:r>
+              <a:rPr lang="en-US" sz="1200" b="1" kern="1200" dirty="0">
+                <a:solidFill>
+                  <a:schemeClr val="tx1"/>
+                </a:solidFill>
+                <a:latin typeface="+mn-lt"/>
+                <a:ea typeface="+mn-ea"/>
+                <a:cs typeface="+mn-cs"/>
+              </a:rPr>
+              <a:t>#pragma</a:t>
+            </a:r>
+            <a:r>
+              <a:rPr lang="en-US" b="1" dirty="0"/>
+              <a:t> Directive</a:t>
+            </a:r>
+          </a:p>
+          <a:p>
+            <a:r>
+              <a:rPr lang="en-US" dirty="0"/>
+              <a:t>Provides machine-specific or compiler-specific instructions.</a:t>
+            </a:r>
+          </a:p>
+          <a:p>
+            <a:endParaRPr lang="en-US" dirty="0"/>
+          </a:p>
+          <a:p>
+            <a:r>
+              <a:rPr lang="en-US" dirty="0"/>
+              <a:t>Example:</a:t>
+            </a:r>
+          </a:p>
+          <a:p>
+            <a:r>
+              <a:rPr lang="en-US" sz="1200" kern="1200" dirty="0">
+                <a:solidFill>
+                  <a:schemeClr val="tx1"/>
+                </a:solidFill>
+                <a:latin typeface="+mn-lt"/>
+                <a:ea typeface="+mn-ea"/>
+                <a:cs typeface="+mn-cs"/>
+              </a:rPr>
+              <a:t>#pragma startup</a:t>
+            </a:r>
+            <a:r>
+              <a:rPr lang="en-US" dirty="0"/>
+              <a:t> or </a:t>
+            </a:r>
+            <a:r>
+              <a:rPr lang="en-US" sz="1200" kern="1200" dirty="0">
+                <a:solidFill>
+                  <a:schemeClr val="tx1"/>
+                </a:solidFill>
+                <a:latin typeface="+mn-lt"/>
+                <a:ea typeface="+mn-ea"/>
+                <a:cs typeface="+mn-cs"/>
+              </a:rPr>
+              <a:t>#pragma exit</a:t>
+            </a:r>
+            <a:r>
+              <a:rPr lang="en-US" dirty="0"/>
+              <a:t> can specify functions to run before </a:t>
+            </a:r>
+            <a:r>
+              <a:rPr lang="en-US" sz="1200" kern="1200" dirty="0">
+                <a:solidFill>
+                  <a:schemeClr val="tx1"/>
+                </a:solidFill>
+                <a:latin typeface="+mn-lt"/>
+                <a:ea typeface="+mn-ea"/>
+                <a:cs typeface="+mn-cs"/>
+              </a:rPr>
+              <a:t>main()</a:t>
+            </a:r>
+            <a:r>
+              <a:rPr lang="en-US" dirty="0"/>
+              <a:t> starts or after it ends.</a:t>
+            </a:r>
+          </a:p>
+          <a:p>
+            <a:endParaRPr lang="en-US" dirty="0"/>
+          </a:p>
+          <a:p>
+            <a:r>
+              <a:rPr lang="en-US" dirty="0"/>
+              <a:t>Implementation varies significantly between different compilers (e.g., GCC vs. Turbo C).</a:t>
+            </a:r>
+          </a:p>
+          <a:p>
+            <a:endParaRPr lang="en-US" dirty="0"/>
+          </a:p>
+          <a:p>
+            <a:r>
+              <a:rPr lang="en-US" b="1" u="sng" dirty="0"/>
+              <a:t>See example:</a:t>
+            </a:r>
+          </a:p>
+          <a:p>
+            <a:r>
+              <a:rPr lang="en-US" b="1" dirty="0" err="1"/>
+              <a:t>param_macro.c</a:t>
+            </a:r>
+            <a:endParaRPr lang="en-US" b="1" dirty="0"/>
           </a:p>
           <a:p>
             <a:endParaRPr lang="en-US" dirty="0"/>
@@ -666,7 +968,7 @@
           <a:p>
             <a:fld id="{9B4AB9FA-5B11-4D9D-985A-ED662E8F848D}" type="slidenum">
               <a:rPr lang="en-US" smtClean="0"/>
-              <a:t>13</a:t>
+              <a:t>12</a:t>
             </a:fld>
             <a:endParaRPr lang="en-US"/>
           </a:p>
@@ -675,7 +977,7 @@
     </p:spTree>
     <p:extLst>
       <p:ext uri="{BB962C8B-B14F-4D97-AF65-F5344CB8AC3E}">
-        <p14:creationId xmlns:p14="http://schemas.microsoft.com/office/powerpoint/2010/main" val="1153004754"/>
+        <p14:creationId xmlns:p14="http://schemas.microsoft.com/office/powerpoint/2010/main" val="3866244320"/>
       </p:ext>
     </p:extLst>
   </p:cSld>
@@ -758,7 +1060,7 @@
           <a:p>
             <a:r>
               <a:rPr lang="en-US" dirty="0"/>
-              <a:t>User-defined syntax: </a:t>
+              <a:t>Standard syntax: </a:t>
             </a:r>
           </a:p>
           <a:p>
@@ -771,11 +1073,11 @@
                 <a:ea typeface="+mn-ea"/>
                 <a:cs typeface="+mn-cs"/>
               </a:rPr>
-              <a:t>#include "filename"</a:t>
+              <a:t>#include &lt;filename&gt;</a:t>
             </a:r>
             <a:r>
               <a:rPr lang="en-US" dirty="0"/>
-              <a:t> for local files.</a:t>
+              <a:t> for system headers.</a:t>
             </a:r>
           </a:p>
           <a:p>
@@ -800,7 +1102,7 @@
           <a:p>
             <a:fld id="{9B4AB9FA-5B11-4D9D-985A-ED662E8F848D}" type="slidenum">
               <a:rPr lang="en-US" smtClean="0"/>
-              <a:t>14</a:t>
+              <a:t>13</a:t>
             </a:fld>
             <a:endParaRPr lang="en-US"/>
           </a:p>
@@ -809,7 +1111,7 @@
     </p:spTree>
     <p:extLst>
       <p:ext uri="{BB962C8B-B14F-4D97-AF65-F5344CB8AC3E}">
-        <p14:creationId xmlns:p14="http://schemas.microsoft.com/office/powerpoint/2010/main" val="3792442233"/>
+        <p14:creationId xmlns:p14="http://schemas.microsoft.com/office/powerpoint/2010/main" val="1153004754"/>
       </p:ext>
     </p:extLst>
   </p:cSld>
@@ -863,6 +1165,56 @@
           <a:bodyPr/>
           <a:lstStyle/>
           <a:p>
+            <a:r>
+              <a:rPr lang="en-US" b="1" dirty="0"/>
+              <a:t>File Inclusion - </a:t>
+            </a:r>
+            <a:r>
+              <a:rPr lang="en-US" sz="1200" b="1" kern="1200" dirty="0">
+                <a:solidFill>
+                  <a:schemeClr val="tx1"/>
+                </a:solidFill>
+                <a:latin typeface="+mn-lt"/>
+                <a:ea typeface="+mn-ea"/>
+                <a:cs typeface="+mn-cs"/>
+              </a:rPr>
+              <a:t>#include</a:t>
+            </a:r>
+            <a:endParaRPr lang="en-US" b="1" dirty="0"/>
+          </a:p>
+          <a:p>
+            <a:r>
+              <a:rPr lang="en-US" dirty="0"/>
+              <a:t>Tells the preprocessor to insert the contents of a specified file into the current file.</a:t>
+            </a:r>
+          </a:p>
+          <a:p>
+            <a:endParaRPr lang="en-US" dirty="0"/>
+          </a:p>
+          <a:p>
+            <a:r>
+              <a:rPr lang="en-US" dirty="0"/>
+              <a:t>User-defined syntax: </a:t>
+            </a:r>
+          </a:p>
+          <a:p>
+            <a:r>
+              <a:rPr lang="en-US" sz="1200" kern="1200" dirty="0">
+                <a:solidFill>
+                  <a:schemeClr val="tx1"/>
+                </a:solidFill>
+                <a:latin typeface="+mn-lt"/>
+                <a:ea typeface="+mn-ea"/>
+                <a:cs typeface="+mn-cs"/>
+              </a:rPr>
+              <a:t>#include "filename"</a:t>
+            </a:r>
+            <a:r>
+              <a:rPr lang="en-US" dirty="0"/>
+              <a:t> for local files.</a:t>
+            </a:r>
+          </a:p>
+          <a:p>
             <a:endParaRPr lang="en-US" dirty="0"/>
           </a:p>
         </p:txBody>
@@ -884,6 +1236,117 @@
           <a:p>
             <a:fld id="{9B4AB9FA-5B11-4D9D-985A-ED662E8F848D}" type="slidenum">
               <a:rPr lang="en-US" smtClean="0"/>
+              <a:t>14</a:t>
+            </a:fld>
+            <a:endParaRPr lang="en-US"/>
+          </a:p>
+        </p:txBody>
+      </p:sp>
+    </p:spTree>
+    <p:extLst>
+      <p:ext uri="{BB962C8B-B14F-4D97-AF65-F5344CB8AC3E}">
+        <p14:creationId xmlns:p14="http://schemas.microsoft.com/office/powerpoint/2010/main" val="3792442233"/>
+      </p:ext>
+    </p:extLst>
+  </p:cSld>
+  <p:clrMapOvr>
+    <a:masterClrMapping/>
+  </p:clrMapOvr>
+</p:notes>
+</file>
+
+<file path=ppt/notesSlides/notesSlide13.xml><?xml version="1.0" encoding="utf-8"?>
+<p:notes xmlns:a="http://schemas.openxmlformats.org/drawingml/2006/main" xmlns:r="http://schemas.openxmlformats.org/officeDocument/2006/relationships" xmlns:p="http://schemas.openxmlformats.org/presentationml/2006/main">
+  <p:cSld>
+    <p:spTree>
+      <p:nvGrpSpPr>
+        <p:cNvPr id="1" name=""/>
+        <p:cNvGrpSpPr/>
+        <p:nvPr/>
+      </p:nvGrpSpPr>
+      <p:grpSpPr>
+        <a:xfrm>
+          <a:off x="0" y="0"/>
+          <a:ext cx="0" cy="0"/>
+          <a:chOff x="0" y="0"/>
+          <a:chExt cx="0" cy="0"/>
+        </a:xfrm>
+      </p:grpSpPr>
+      <p:sp>
+        <p:nvSpPr>
+          <p:cNvPr id="2" name="Slide Image Placeholder 1"/>
+          <p:cNvSpPr>
+            <a:spLocks noGrp="1" noRot="1" noChangeAspect="1"/>
+          </p:cNvSpPr>
+          <p:nvPr>
+            <p:ph type="sldImg"/>
+          </p:nvPr>
+        </p:nvSpPr>
+        <p:spPr/>
+      </p:sp>
+      <p:sp>
+        <p:nvSpPr>
+          <p:cNvPr id="3" name="Notes Placeholder 2"/>
+          <p:cNvSpPr>
+            <a:spLocks noGrp="1"/>
+          </p:cNvSpPr>
+          <p:nvPr>
+            <p:ph type="body" idx="1"/>
+          </p:nvPr>
+        </p:nvSpPr>
+        <p:spPr/>
+        <p:txBody>
+          <a:bodyPr/>
+          <a:lstStyle/>
+          <a:p>
+            <a:r>
+              <a:rPr lang="en-US" b="1" u="sng" dirty="0"/>
+              <a:t>See example:</a:t>
+            </a:r>
+          </a:p>
+          <a:p>
+            <a:r>
+              <a:rPr lang="en-US" b="1" dirty="0" err="1"/>
+              <a:t>myheader.h</a:t>
+            </a:r>
+            <a:endParaRPr lang="en-US" b="1" dirty="0"/>
+          </a:p>
+          <a:p>
+            <a:r>
+              <a:rPr lang="en-US" b="1" dirty="0" err="1"/>
+              <a:t>myheader.c</a:t>
+            </a:r>
+            <a:endParaRPr lang="en-US" b="1" dirty="0"/>
+          </a:p>
+          <a:p>
+            <a:r>
+              <a:rPr lang="en-US" b="1" dirty="0" err="1"/>
+              <a:t>main.c</a:t>
+            </a:r>
+            <a:endParaRPr lang="en-US" b="1" dirty="0"/>
+          </a:p>
+          <a:p>
+            <a:endParaRPr lang="en-US" dirty="0"/>
+          </a:p>
+        </p:txBody>
+      </p:sp>
+      <p:sp>
+        <p:nvSpPr>
+          <p:cNvPr id="4" name="Slide Number Placeholder 3"/>
+          <p:cNvSpPr>
+            <a:spLocks noGrp="1"/>
+          </p:cNvSpPr>
+          <p:nvPr>
+            <p:ph type="sldNum" sz="quarter" idx="5"/>
+          </p:nvPr>
+        </p:nvSpPr>
+        <p:spPr/>
+        <p:txBody>
+          <a:bodyPr/>
+          <a:lstStyle/>
+          <a:p>
+            <a:fld id="{9B4AB9FA-5B11-4D9D-985A-ED662E8F848D}" type="slidenum">
+              <a:rPr lang="en-US" smtClean="0"/>
               <a:t>15</a:t>
             </a:fld>
             <a:endParaRPr lang="en-US"/>
@@ -903,7 +1366,7 @@
 </p:notes>
 </file>
 
-<file path=ppt/notesSlides/notesSlide13.xml><?xml version="1.0" encoding="utf-8"?>
+<file path=ppt/notesSlides/notesSlide14.xml><?xml version="1.0" encoding="utf-8"?>
 <p:notes xmlns:a="http://schemas.openxmlformats.org/drawingml/2006/main" xmlns:r="http://schemas.openxmlformats.org/officeDocument/2006/relationships" xmlns:p="http://schemas.openxmlformats.org/presentationml/2006/main">
   <p:cSld>
     <p:spTree>
@@ -1114,6 +1577,98 @@
           <a:p>
             <a:endParaRPr lang="en-US" dirty="0"/>
           </a:p>
+          <a:p>
+            <a:r>
+              <a:rPr lang="en-US" b="1" dirty="0"/>
+              <a:t>The Compilation Process </a:t>
+            </a:r>
+            <a:r>
+              <a:rPr lang="en-US" dirty="0"/>
+              <a:t>showing a vertical stack of four components: </a:t>
+            </a:r>
+          </a:p>
+          <a:p>
+            <a:pPr marL="228600" indent="-228600">
+              <a:buFont typeface="+mj-lt"/>
+              <a:buAutoNum type="arabicPeriod"/>
+            </a:pPr>
+            <a:r>
+              <a:rPr lang="en-US" dirty="0"/>
+              <a:t>Pre-processor, </a:t>
+            </a:r>
+          </a:p>
+          <a:p>
+            <a:pPr marL="228600" indent="-228600">
+              <a:buFont typeface="+mj-lt"/>
+              <a:buAutoNum type="arabicPeriod"/>
+            </a:pPr>
+            <a:r>
+              <a:rPr lang="en-US" dirty="0"/>
+              <a:t>Compiler, </a:t>
+            </a:r>
+          </a:p>
+          <a:p>
+            <a:pPr marL="228600" indent="-228600">
+              <a:buFont typeface="+mj-lt"/>
+              <a:buAutoNum type="arabicPeriod"/>
+            </a:pPr>
+            <a:r>
+              <a:rPr lang="en-US" dirty="0"/>
+              <a:t>Assembler, </a:t>
+            </a:r>
+          </a:p>
+          <a:p>
+            <a:pPr marL="228600" indent="-228600">
+              <a:buFont typeface="+mj-lt"/>
+              <a:buAutoNum type="arabicPeriod"/>
+            </a:pPr>
+            <a:r>
+              <a:rPr lang="en-US" dirty="0"/>
+              <a:t>and Linker. </a:t>
+            </a:r>
+          </a:p>
+          <a:p>
+            <a:endParaRPr lang="en-US" dirty="0"/>
+          </a:p>
+          <a:p>
+            <a:r>
+              <a:rPr lang="en-US" dirty="0"/>
+              <a:t>It tracks the flow </a:t>
+            </a:r>
+          </a:p>
+          <a:p>
+            <a:pPr marL="171450" indent="-171450">
+              <a:buFont typeface="Arial" panose="020B0604020202020204" pitchFamily="34" charset="0"/>
+              <a:buChar char="•"/>
+            </a:pPr>
+            <a:r>
+              <a:rPr lang="en-US" dirty="0"/>
+              <a:t>from Source code (.c file) at the top </a:t>
+            </a:r>
+          </a:p>
+          <a:p>
+            <a:pPr marL="171450" indent="-171450">
+              <a:buFont typeface="Arial" panose="020B0604020202020204" pitchFamily="34" charset="0"/>
+              <a:buChar char="•"/>
+            </a:pPr>
+            <a:r>
+              <a:rPr lang="en-US" dirty="0"/>
+              <a:t>to an Executable file at the bottom, </a:t>
+            </a:r>
+          </a:p>
+          <a:p>
+            <a:pPr marL="171450" indent="-171450">
+              <a:buFont typeface="Arial" panose="020B0604020202020204" pitchFamily="34" charset="0"/>
+              <a:buChar char="•"/>
+            </a:pPr>
+            <a:r>
+              <a:rPr lang="en-US" dirty="0"/>
+              <a:t>with side paths for Assembly Code, Libraries, and Object files (.o)</a:t>
+            </a:r>
+          </a:p>
+          <a:p>
+            <a:endParaRPr lang="en-US" dirty="0"/>
+          </a:p>
         </p:txBody>
       </p:sp>
       <p:sp>
@@ -1833,6 +2388,22 @@
           <a:p>
             <a:endParaRPr lang="en-US" dirty="0"/>
           </a:p>
+          <a:p>
+            <a:r>
+              <a:rPr lang="en-US" b="1" u="sng" dirty="0"/>
+              <a:t>See example:</a:t>
+            </a:r>
+          </a:p>
+          <a:p>
+            <a:r>
+              <a:rPr lang="en-US" b="1" dirty="0" err="1"/>
+              <a:t>define.c</a:t>
+            </a:r>
+            <a:endParaRPr lang="en-US" b="1" dirty="0"/>
+          </a:p>
+          <a:p>
+            <a:endParaRPr lang="en-US" dirty="0"/>
+          </a:p>
         </p:txBody>
       </p:sp>
       <p:sp>
@@ -1985,6 +2556,22 @@
           <a:p>
             <a:endParaRPr lang="en-US" dirty="0"/>
           </a:p>
+          <a:p>
+            <a:r>
+              <a:rPr lang="en-US" b="1" u="sng" dirty="0"/>
+              <a:t>See example:</a:t>
+            </a:r>
+          </a:p>
+          <a:p>
+            <a:r>
+              <a:rPr lang="en-US" b="1" dirty="0" err="1"/>
+              <a:t>if.c</a:t>
+            </a:r>
+            <a:endParaRPr lang="en-US" b="1" dirty="0"/>
+          </a:p>
+          <a:p>
+            <a:endParaRPr lang="en-US" dirty="0"/>
+          </a:p>
         </p:txBody>
       </p:sp>
       <p:sp>
@@ -2142,6 +2729,34 @@
             </a:pPr>
             <a:endParaRPr lang="en-US" dirty="0"/>
           </a:p>
+          <a:p>
+            <a:pPr marL="0" indent="0">
+              <a:buFont typeface="Arial" panose="020B0604020202020204" pitchFamily="34" charset="0"/>
+              <a:buNone/>
+            </a:pPr>
+            <a:r>
+              <a:rPr lang="en-US" b="1" u="sng" dirty="0"/>
+              <a:t>See example:</a:t>
+            </a:r>
+          </a:p>
+          <a:p>
+            <a:pPr marL="0" indent="0">
+              <a:buFont typeface="Arial" panose="020B0604020202020204" pitchFamily="34" charset="0"/>
+              <a:buNone/>
+            </a:pPr>
+            <a:r>
+              <a:rPr lang="en-US" b="1" dirty="0" err="1"/>
+              <a:t>ifdef.c</a:t>
+            </a:r>
+            <a:endParaRPr lang="en-US" b="1" dirty="0"/>
+          </a:p>
+          <a:p>
+            <a:pPr marL="0" indent="0">
+              <a:buFont typeface="Arial" panose="020B0604020202020204" pitchFamily="34" charset="0"/>
+              <a:buNone/>
+            </a:pPr>
+            <a:endParaRPr lang="en-US" dirty="0"/>
+          </a:p>
         </p:txBody>
       </p:sp>
       <p:sp>
@@ -2369,6 +2984,22 @@
           <a:p>
             <a:endParaRPr lang="en-US" dirty="0"/>
           </a:p>
+          <a:p>
+            <a:r>
+              <a:rPr lang="en-US" b="1" u="sng" dirty="0"/>
+              <a:t>See example:</a:t>
+            </a:r>
+          </a:p>
+          <a:p>
+            <a:r>
+              <a:rPr lang="en-US" b="1" dirty="0" err="1"/>
+              <a:t>ifndef.c</a:t>
+            </a:r>
+            <a:endParaRPr lang="en-US" b="1" dirty="0"/>
+          </a:p>
+          <a:p>
+            <a:endParaRPr lang="en-US" dirty="0"/>
+          </a:p>
         </p:txBody>
       </p:sp>
       <p:sp>
@@ -2515,6 +3146,22 @@
           <a:p>
             <a:endParaRPr lang="en-US" dirty="0"/>
           </a:p>
+          <a:p>
+            <a:r>
+              <a:rPr lang="en-US" b="1" u="sng" dirty="0"/>
+              <a:t>See example:</a:t>
+            </a:r>
+          </a:p>
+          <a:p>
+            <a:r>
+              <a:rPr lang="en-US" b="1" dirty="0" err="1"/>
+              <a:t>undef.c</a:t>
+            </a:r>
+            <a:endParaRPr lang="en-US" b="1" dirty="0"/>
+          </a:p>
+          <a:p>
+            <a:endParaRPr lang="en-US" dirty="0"/>
+          </a:p>
         </p:txBody>
       </p:sp>
       <p:sp>
@@ -2598,339 +3245,16 @@
           <a:lstStyle/>
           <a:p>
             <a:r>
-              <a:rPr lang="en-US" b="1" dirty="0"/>
-              <a:t>Macro Expansion Pitfalls</a:t>
-            </a:r>
-          </a:p>
-          <a:p>
-            <a:r>
-              <a:rPr lang="en-US" dirty="0"/>
-              <a:t>Lack of parentheses in macro definitions can lead to logical errors due to operator precedence.</a:t>
-            </a:r>
-          </a:p>
-          <a:p>
-            <a:endParaRPr lang="en-US" dirty="0"/>
-          </a:p>
-          <a:p>
-            <a:r>
-              <a:rPr lang="en-US" dirty="0"/>
-              <a:t>Example: </a:t>
-            </a:r>
-          </a:p>
-          <a:p>
-            <a:r>
-              <a:rPr lang="en-US" sz="1200" kern="1200" dirty="0">
-                <a:solidFill>
-                  <a:schemeClr val="tx1"/>
-                </a:solidFill>
-                <a:latin typeface="+mn-lt"/>
-                <a:ea typeface="+mn-ea"/>
-                <a:cs typeface="+mn-cs"/>
-              </a:rPr>
-              <a:t>SQUARE(3+4)</a:t>
-            </a:r>
-            <a:r>
-              <a:rPr lang="en-US" dirty="0"/>
-              <a:t> without internal parentheses would expand to </a:t>
-            </a:r>
-            <a:r>
-              <a:rPr lang="en-US" sz="1200" kern="1200" dirty="0">
-                <a:solidFill>
-                  <a:schemeClr val="tx1"/>
-                </a:solidFill>
-                <a:latin typeface="+mn-lt"/>
-                <a:ea typeface="+mn-ea"/>
-                <a:cs typeface="+mn-cs"/>
-              </a:rPr>
-              <a:t>3+4 * 3+4</a:t>
-            </a:r>
-            <a:r>
-              <a:rPr lang="en-US" dirty="0"/>
-              <a:t>, resulting in </a:t>
-            </a:r>
-            <a:r>
-              <a:rPr lang="en-US" sz="1200" kern="1200" dirty="0">
-                <a:solidFill>
-                  <a:schemeClr val="tx1"/>
-                </a:solidFill>
-                <a:latin typeface="+mn-lt"/>
-                <a:ea typeface="+mn-ea"/>
-                <a:cs typeface="+mn-cs"/>
-              </a:rPr>
-              <a:t>19</a:t>
-            </a:r>
-            <a:r>
-              <a:rPr lang="en-US" dirty="0"/>
-              <a:t> instead of </a:t>
-            </a:r>
-            <a:r>
-              <a:rPr lang="en-US" sz="1200" kern="1200" dirty="0">
-                <a:solidFill>
-                  <a:schemeClr val="tx1"/>
-                </a:solidFill>
-                <a:latin typeface="+mn-lt"/>
-                <a:ea typeface="+mn-ea"/>
-                <a:cs typeface="+mn-cs"/>
-              </a:rPr>
-              <a:t>49</a:t>
-            </a:r>
-            <a:r>
-              <a:rPr lang="en-US" dirty="0"/>
-              <a:t>.</a:t>
-            </a:r>
-          </a:p>
-          <a:p>
-            <a:endParaRPr lang="en-US" dirty="0"/>
-          </a:p>
-          <a:p>
-            <a:r>
-              <a:rPr lang="en-US" b="1" dirty="0"/>
-              <a:t>Macros vs. Functions</a:t>
-            </a:r>
-          </a:p>
-          <a:p>
-            <a:pPr marL="171450" indent="-171450">
-              <a:buFont typeface="Arial" panose="020B0604020202020204" pitchFamily="34" charset="0"/>
-              <a:buChar char="•"/>
-            </a:pPr>
-            <a:r>
-              <a:rPr lang="en-US" b="1" dirty="0"/>
-              <a:t>Macros</a:t>
-            </a:r>
-            <a:r>
-              <a:rPr lang="en-US" dirty="0"/>
-              <a:t>: </a:t>
-            </a:r>
-            <a:br>
-              <a:rPr lang="en-US" dirty="0"/>
-            </a:br>
-            <a:r>
-              <a:rPr lang="en-US" dirty="0"/>
-              <a:t>Pre-processed, no type checking, no call overhead, </a:t>
-            </a:r>
-            <a:br>
-              <a:rPr lang="en-US" dirty="0"/>
-            </a:br>
-            <a:r>
-              <a:rPr lang="en-US" dirty="0"/>
-              <a:t>code size increases as they are expanded in-place.</a:t>
-            </a:r>
-          </a:p>
-          <a:p>
-            <a:pPr marL="171450" indent="-171450">
-              <a:buFont typeface="Arial" panose="020B0604020202020204" pitchFamily="34" charset="0"/>
-              <a:buChar char="•"/>
-            </a:pPr>
-            <a:r>
-              <a:rPr lang="en-US" b="1" dirty="0"/>
-              <a:t>Functions</a:t>
-            </a:r>
-            <a:r>
-              <a:rPr lang="en-US" dirty="0"/>
-              <a:t>: </a:t>
-            </a:r>
-            <a:br>
-              <a:rPr lang="en-US" dirty="0"/>
-            </a:br>
-            <a:r>
-              <a:rPr lang="en-US" dirty="0"/>
-              <a:t>Compiled, strict type checking, involves call overhead, </a:t>
-            </a:r>
-            <a:br>
-              <a:rPr lang="en-US" dirty="0"/>
-            </a:br>
-            <a:r>
-              <a:rPr lang="en-US" dirty="0"/>
-              <a:t>code size remains smaller as the function is stored in one place.</a:t>
-            </a:r>
-          </a:p>
-          <a:p>
-            <a:endParaRPr lang="en-US" dirty="0"/>
-          </a:p>
-          <a:p>
-            <a:endParaRPr lang="en-US" dirty="0"/>
-          </a:p>
-          <a:p>
-            <a:r>
-              <a:rPr lang="en-US" i="1" u="sng" dirty="0"/>
-              <a:t>Optional:</a:t>
-            </a:r>
-          </a:p>
-          <a:p>
-            <a:endParaRPr lang="en-US" dirty="0"/>
-          </a:p>
-          <a:p>
-            <a:r>
-              <a:rPr lang="en-US" b="1" dirty="0"/>
-              <a:t>Miscellaneous Directives (</a:t>
-            </a:r>
-            <a:r>
-              <a:rPr lang="en-US" sz="1200" b="1" kern="1200" dirty="0">
-                <a:solidFill>
-                  <a:schemeClr val="tx1"/>
-                </a:solidFill>
-                <a:latin typeface="+mn-lt"/>
-                <a:ea typeface="+mn-ea"/>
-                <a:cs typeface="+mn-cs"/>
-              </a:rPr>
-              <a:t>#error</a:t>
-            </a:r>
-            <a:r>
-              <a:rPr lang="en-US" b="1" dirty="0"/>
-              <a:t>, </a:t>
-            </a:r>
-            <a:r>
-              <a:rPr lang="en-US" sz="1200" b="1" kern="1200" dirty="0">
-                <a:solidFill>
-                  <a:schemeClr val="tx1"/>
-                </a:solidFill>
-                <a:latin typeface="+mn-lt"/>
-                <a:ea typeface="+mn-ea"/>
-                <a:cs typeface="+mn-cs"/>
-              </a:rPr>
-              <a:t>#line</a:t>
-            </a:r>
-            <a:r>
-              <a:rPr lang="en-US" b="1" dirty="0"/>
-              <a:t>)</a:t>
-            </a:r>
-          </a:p>
-          <a:p>
-            <a:pPr marL="171450" indent="-171450">
-              <a:buFont typeface="Arial" panose="020B0604020202020204" pitchFamily="34" charset="0"/>
-              <a:buChar char="•"/>
-            </a:pPr>
-            <a:r>
-              <a:rPr lang="en-US" sz="1200" kern="1200" dirty="0">
-                <a:solidFill>
-                  <a:schemeClr val="tx1"/>
-                </a:solidFill>
-                <a:latin typeface="+mn-lt"/>
-                <a:ea typeface="+mn-ea"/>
-                <a:cs typeface="+mn-cs"/>
-              </a:rPr>
-              <a:t>#error</a:t>
-            </a:r>
-            <a:r>
-              <a:rPr lang="en-US" dirty="0"/>
-              <a:t>: Forces the compiler to stop and display a specific message.</a:t>
-            </a:r>
-          </a:p>
-          <a:p>
-            <a:pPr marL="171450" indent="-171450">
-              <a:buFont typeface="Arial" panose="020B0604020202020204" pitchFamily="34" charset="0"/>
-              <a:buChar char="•"/>
-            </a:pPr>
-            <a:r>
-              <a:rPr lang="en-US" sz="1200" kern="1200" dirty="0">
-                <a:solidFill>
-                  <a:schemeClr val="tx1"/>
-                </a:solidFill>
-                <a:latin typeface="+mn-lt"/>
-                <a:ea typeface="+mn-ea"/>
-                <a:cs typeface="+mn-cs"/>
-              </a:rPr>
-              <a:t>#line</a:t>
-            </a:r>
-            <a:r>
-              <a:rPr lang="en-US" dirty="0"/>
-              <a:t>: Used to change the line number and filename reported by the compiler during error messages.</a:t>
-            </a:r>
-          </a:p>
-          <a:p>
-            <a:endParaRPr lang="en-US" dirty="0"/>
-          </a:p>
-          <a:p>
-            <a:r>
-              <a:rPr lang="en-US" b="1" dirty="0"/>
-              <a:t>The </a:t>
-            </a:r>
-            <a:r>
-              <a:rPr lang="en-US" sz="1200" b="1" kern="1200" dirty="0">
-                <a:solidFill>
-                  <a:schemeClr val="tx1"/>
-                </a:solidFill>
-                <a:latin typeface="+mn-lt"/>
-                <a:ea typeface="+mn-ea"/>
-                <a:cs typeface="+mn-cs"/>
-              </a:rPr>
-              <a:t>#pragma</a:t>
-            </a:r>
-            <a:r>
-              <a:rPr lang="en-US" b="1" dirty="0"/>
-              <a:t> Directive</a:t>
-            </a:r>
-          </a:p>
-          <a:p>
-            <a:r>
-              <a:rPr lang="en-US" dirty="0"/>
-              <a:t>Provides machine-specific or compiler-specific instructions.</a:t>
-            </a:r>
-          </a:p>
-          <a:p>
-            <a:endParaRPr lang="en-US" dirty="0"/>
-          </a:p>
-          <a:p>
-            <a:r>
-              <a:rPr lang="en-US" dirty="0"/>
-              <a:t>Example:</a:t>
-            </a:r>
-          </a:p>
-          <a:p>
-            <a:r>
-              <a:rPr lang="en-US" sz="1200" kern="1200" dirty="0">
-                <a:solidFill>
-                  <a:schemeClr val="tx1"/>
-                </a:solidFill>
-                <a:latin typeface="+mn-lt"/>
-                <a:ea typeface="+mn-ea"/>
-                <a:cs typeface="+mn-cs"/>
-              </a:rPr>
-              <a:t>#pragma startup</a:t>
-            </a:r>
-            <a:r>
-              <a:rPr lang="en-US" dirty="0"/>
-              <a:t> or </a:t>
-            </a:r>
-            <a:r>
-              <a:rPr lang="en-US" sz="1200" kern="1200" dirty="0">
-                <a:solidFill>
-                  <a:schemeClr val="tx1"/>
-                </a:solidFill>
-                <a:latin typeface="+mn-lt"/>
-                <a:ea typeface="+mn-ea"/>
-                <a:cs typeface="+mn-cs"/>
-              </a:rPr>
-              <a:t>#pragma exit</a:t>
-            </a:r>
-            <a:r>
-              <a:rPr lang="en-US" dirty="0"/>
-              <a:t> can specify functions to run before </a:t>
-            </a:r>
-            <a:r>
-              <a:rPr lang="en-US" sz="1200" kern="1200" dirty="0">
-                <a:solidFill>
-                  <a:schemeClr val="tx1"/>
-                </a:solidFill>
-                <a:latin typeface="+mn-lt"/>
-                <a:ea typeface="+mn-ea"/>
-                <a:cs typeface="+mn-cs"/>
-              </a:rPr>
-              <a:t>main()</a:t>
-            </a:r>
-            <a:r>
-              <a:rPr lang="en-US" dirty="0"/>
-              <a:t> starts or after it ends.</a:t>
-            </a:r>
-          </a:p>
-          <a:p>
-            <a:endParaRPr lang="en-US" dirty="0"/>
-          </a:p>
-          <a:p>
-            <a:r>
-              <a:rPr lang="en-US" dirty="0"/>
-              <a:t>Implementation varies significantly between different compilers (e.g., GCC vs. Turbo C).</a:t>
-            </a:r>
+              <a:rPr lang="en-US" b="1" u="sng" dirty="0"/>
+              <a:t>See example:</a:t>
+            </a:r>
+          </a:p>
+          <a:p>
+            <a:r>
+              <a:rPr lang="en-US" b="1" dirty="0" err="1"/>
+              <a:t>simple_macro.c</a:t>
+            </a:r>
+            <a:endParaRPr lang="en-US" b="1" dirty="0"/>
           </a:p>
           <a:p>
             <a:endParaRPr lang="en-US" dirty="0"/>
@@ -2954,7 +3278,7 @@
           <a:p>
             <a:fld id="{9B4AB9FA-5B11-4D9D-985A-ED662E8F848D}" type="slidenum">
               <a:rPr lang="en-US" smtClean="0"/>
-              <a:t>12</a:t>
+              <a:t>11</a:t>
             </a:fld>
             <a:endParaRPr lang="en-US"/>
           </a:p>
@@ -2963,7 +3287,7 @@
     </p:spTree>
     <p:extLst>
       <p:ext uri="{BB962C8B-B14F-4D97-AF65-F5344CB8AC3E}">
-        <p14:creationId xmlns:p14="http://schemas.microsoft.com/office/powerpoint/2010/main" val="3866244320"/>
+        <p14:creationId xmlns:p14="http://schemas.microsoft.com/office/powerpoint/2010/main" val="3377831889"/>
       </p:ext>
     </p:extLst>
   </p:cSld>
@@ -3124,7 +3448,7 @@
           <a:p>
             <a:fld id="{1D8BD707-D9CF-40AE-B4C6-C98DA3205C09}" type="datetimeFigureOut">
               <a:rPr lang="en-US"/>
-              <a:t>2/7/2026</a:t>
+              <a:t>2/9/2026</a:t>
             </a:fld>
             <a:endParaRPr lang="en-US"/>
           </a:p>
@@ -3301,7 +3625,7 @@
           <a:p>
             <a:fld id="{1D8BD707-D9CF-40AE-B4C6-C98DA3205C09}" type="datetimeFigureOut">
               <a:rPr lang="en-US"/>
-              <a:t>2/7/2026</a:t>
+              <a:t>2/9/2026</a:t>
             </a:fld>
             <a:endParaRPr lang="en-US"/>
           </a:p>
@@ -3515,7 +3839,7 @@
           <a:p>
             <a:fld id="{1D8BD707-D9CF-40AE-B4C6-C98DA3205C09}" type="datetimeFigureOut">
               <a:rPr lang="en-US"/>
-              <a:t>2/7/2026</a:t>
+              <a:t>2/9/2026</a:t>
             </a:fld>
             <a:endParaRPr lang="en-US"/>
           </a:p>
@@ -3663,7 +3987,7 @@
           <a:p>
             <a:fld id="{1D8BD707-D9CF-40AE-B4C6-C98DA3205C09}" type="datetimeFigureOut">
               <a:rPr lang="en-US"/>
-              <a:t>2/7/2026</a:t>
+              <a:t>2/9/2026</a:t>
             </a:fld>
             <a:endParaRPr lang="en-US"/>
           </a:p>
@@ -3782,7 +4106,7 @@
           <a:p>
             <a:fld id="{1D8BD707-D9CF-40AE-B4C6-C98DA3205C09}" type="datetimeFigureOut">
               <a:rPr lang="en-US"/>
-              <a:t>2/7/2026</a:t>
+              <a:t>2/9/2026</a:t>
             </a:fld>
             <a:endParaRPr lang="en-US"/>
           </a:p>
@@ -4029,7 +4353,7 @@
           <a:p>
             <a:fld id="{1D8BD707-D9CF-40AE-B4C6-C98DA3205C09}" type="datetimeFigureOut">
               <a:rPr lang="en-US"/>
-              <a:t>2/7/2026</a:t>
+              <a:t>2/9/2026</a:t>
             </a:fld>
             <a:endParaRPr lang="en-US"/>
           </a:p>
@@ -6224,7 +6548,7 @@
           <p:nvPr/>
         </p:nvPicPr>
         <p:blipFill>
-          <a:blip r:embed="rId2" cstate="print"/>
+          <a:blip r:embed="rId3" cstate="print"/>
           <a:stretch>
             <a:fillRect/>
           </a:stretch>
@@ -9251,7 +9575,7 @@
               </a:rPr>
               <a:t>myheader.o</a:t>
             </a:r>
-            <a:endParaRPr sz="1800">
+            <a:endParaRPr sz="1800" dirty="0">
               <a:latin typeface="Arial MT"/>
               <a:cs typeface="Arial MT"/>
             </a:endParaRPr>
@@ -9402,7 +9726,7 @@
               </a:rPr>
               <a:t>main.o</a:t>
             </a:r>
-            <a:endParaRPr sz="1800">
+            <a:endParaRPr sz="1800" dirty="0">
               <a:latin typeface="Arial MT"/>
               <a:cs typeface="Arial MT"/>
             </a:endParaRPr>
@@ -9713,7 +10037,7 @@
               </a:rPr>
               <a:t>myprogram</a:t>
             </a:r>
-            <a:endParaRPr sz="1800">
+            <a:endParaRPr sz="1800" dirty="0">
               <a:latin typeface="Arial MT"/>
               <a:cs typeface="Arial MT"/>
             </a:endParaRPr>
